--- a/docs/Presentation/ProjetISY_Groupe1_FAVAREL_MURGIA_PRUDHOMME_QUIVRONT.pptx
+++ b/docs/Presentation/ProjetISY_Groupe1_FAVAREL_MURGIA_PRUDHOMME_QUIVRONT.pptx
@@ -245,6 +245,11 @@
       </a:defRPr>
     </a:lvl9pPr>
   </p:defaultTextStyle>
+  <p:extLst>
+    <p:ext uri="{EFAFB233-063F-42B5-8137-9DF3F51BA10A}">
+      <p15:sldGuideLst xmlns:p15="http://schemas.microsoft.com/office/powerpoint/2012/main"/>
+    </p:ext>
+  </p:extLst>
 </p:presentation>
 </file>
 
@@ -40136,6 +40141,174 @@
           <a:chExt cx="0" cy="0"/>
         </a:xfrm>
       </p:grpSpPr>
+      <p:grpSp>
+        <p:nvGrpSpPr>
+          <p:cNvPr id="2" name="Google Shape;742;p43">
+            <a:extLst>
+              <a:ext uri="{FF2B5EF4-FFF2-40B4-BE49-F238E27FC236}">
+                <a16:creationId xmlns:a16="http://schemas.microsoft.com/office/drawing/2014/main" id="{2C89A703-AE79-F0DC-0001-FC73CD65B57A}"/>
+              </a:ext>
+            </a:extLst>
+          </p:cNvPr>
+          <p:cNvGrpSpPr/>
+          <p:nvPr/>
+        </p:nvGrpSpPr>
+        <p:grpSpPr>
+          <a:xfrm>
+            <a:off x="3700154" y="336561"/>
+            <a:ext cx="1754558" cy="789628"/>
+            <a:chOff x="4833700" y="1714500"/>
+            <a:chExt cx="3519300" cy="2099825"/>
+          </a:xfrm>
+          <a:solidFill>
+            <a:schemeClr val="accent4"/>
+          </a:solidFill>
+        </p:grpSpPr>
+        <p:sp>
+          <p:nvSpPr>
+            <p:cNvPr id="3" name="Google Shape;743;p43">
+              <a:extLst>
+                <a:ext uri="{FF2B5EF4-FFF2-40B4-BE49-F238E27FC236}">
+                  <a16:creationId xmlns:a16="http://schemas.microsoft.com/office/drawing/2014/main" id="{7C645C50-5A50-65DE-DBBC-B4D34A296DED}"/>
+                </a:ext>
+              </a:extLst>
+            </p:cNvPr>
+            <p:cNvSpPr/>
+            <p:nvPr/>
+          </p:nvSpPr>
+          <p:spPr>
+            <a:xfrm>
+              <a:off x="5031300" y="1714500"/>
+              <a:ext cx="3124200" cy="1880400"/>
+            </a:xfrm>
+            <a:prstGeom prst="round2SameRect">
+              <a:avLst>
+                <a:gd name="adj1" fmla="val 11834"/>
+                <a:gd name="adj2" fmla="val 0"/>
+              </a:avLst>
+            </a:prstGeom>
+            <a:grpFill/>
+            <a:ln w="12700">
+              <a:solidFill>
+                <a:schemeClr val="tx1"/>
+              </a:solidFill>
+            </a:ln>
+          </p:spPr>
+          <p:txBody>
+            <a:bodyPr spcFirstLastPara="1" wrap="square" lIns="91425" tIns="91425" rIns="91425" bIns="91425" anchor="ctr" anchorCtr="0">
+              <a:noAutofit/>
+            </a:bodyPr>
+            <a:lstStyle/>
+            <a:p>
+              <a:pPr marL="0" lvl="0" indent="0" algn="l" rtl="0">
+                <a:spcBef>
+                  <a:spcPts val="0"/>
+                </a:spcBef>
+                <a:spcAft>
+                  <a:spcPts val="0"/>
+                </a:spcAft>
+                <a:buNone/>
+              </a:pPr>
+              <a:endParaRPr/>
+            </a:p>
+          </p:txBody>
+        </p:sp>
+        <p:sp>
+          <p:nvSpPr>
+            <p:cNvPr id="4" name="Google Shape;744;p43">
+              <a:extLst>
+                <a:ext uri="{FF2B5EF4-FFF2-40B4-BE49-F238E27FC236}">
+                  <a16:creationId xmlns:a16="http://schemas.microsoft.com/office/drawing/2014/main" id="{A4C6B08A-4917-92E0-6298-BF1174AB26AF}"/>
+                </a:ext>
+              </a:extLst>
+            </p:cNvPr>
+            <p:cNvSpPr/>
+            <p:nvPr/>
+          </p:nvSpPr>
+          <p:spPr>
+            <a:xfrm rot="10800000">
+              <a:off x="4833700" y="3594725"/>
+              <a:ext cx="3519300" cy="219600"/>
+            </a:xfrm>
+            <a:prstGeom prst="round2SameRect">
+              <a:avLst>
+                <a:gd name="adj1" fmla="val 41053"/>
+                <a:gd name="adj2" fmla="val 0"/>
+              </a:avLst>
+            </a:prstGeom>
+            <a:grpFill/>
+            <a:ln w="12700">
+              <a:solidFill>
+                <a:schemeClr val="tx1"/>
+              </a:solidFill>
+            </a:ln>
+          </p:spPr>
+          <p:txBody>
+            <a:bodyPr spcFirstLastPara="1" wrap="square" lIns="91425" tIns="91425" rIns="91425" bIns="91425" anchor="ctr" anchorCtr="0">
+              <a:noAutofit/>
+            </a:bodyPr>
+            <a:lstStyle/>
+            <a:p>
+              <a:pPr marL="0" lvl="0" indent="0" algn="l" rtl="0">
+                <a:spcBef>
+                  <a:spcPts val="0"/>
+                </a:spcBef>
+                <a:spcAft>
+                  <a:spcPts val="0"/>
+                </a:spcAft>
+                <a:buNone/>
+              </a:pPr>
+              <a:endParaRPr/>
+            </a:p>
+          </p:txBody>
+        </p:sp>
+        <p:sp>
+          <p:nvSpPr>
+            <p:cNvPr id="5" name="Google Shape;745;p43">
+              <a:extLst>
+                <a:ext uri="{FF2B5EF4-FFF2-40B4-BE49-F238E27FC236}">
+                  <a16:creationId xmlns:a16="http://schemas.microsoft.com/office/drawing/2014/main" id="{3D6A4170-8ACD-C6EA-7E1C-9C2F1E85DCAB}"/>
+                </a:ext>
+              </a:extLst>
+            </p:cNvPr>
+            <p:cNvSpPr/>
+            <p:nvPr/>
+          </p:nvSpPr>
+          <p:spPr>
+            <a:xfrm>
+              <a:off x="6566400" y="1772300"/>
+              <a:ext cx="54000" cy="54000"/>
+            </a:xfrm>
+            <a:prstGeom prst="ellipse">
+              <a:avLst/>
+            </a:prstGeom>
+            <a:grpFill/>
+            <a:ln w="12700">
+              <a:solidFill>
+                <a:schemeClr val="tx1"/>
+              </a:solidFill>
+            </a:ln>
+          </p:spPr>
+          <p:txBody>
+            <a:bodyPr spcFirstLastPara="1" wrap="square" lIns="91425" tIns="91425" rIns="91425" bIns="91425" anchor="ctr" anchorCtr="0">
+              <a:noAutofit/>
+            </a:bodyPr>
+            <a:lstStyle/>
+            <a:p>
+              <a:pPr marL="0" lvl="0" indent="0" algn="l" rtl="0">
+                <a:spcBef>
+                  <a:spcPts val="0"/>
+                </a:spcBef>
+                <a:spcAft>
+                  <a:spcPts val="0"/>
+                </a:spcAft>
+                <a:buNone/>
+              </a:pPr>
+              <a:endParaRPr/>
+            </a:p>
+          </p:txBody>
+        </p:sp>
+      </p:grpSp>
       <p:sp>
         <p:nvSpPr>
           <p:cNvPr id="427" name="Google Shape;427;p34"/>
@@ -40255,10 +40428,18 @@
               <a:buNone/>
             </a:pPr>
             <a:r>
-              <a:rPr lang="en" sz="2000"/>
-              <a:t>Projet ISY - Groupe 1</a:t>
+              <a:rPr lang="en" sz="2400" dirty="0">
+                <a:solidFill>
+                  <a:schemeClr val="bg1"/>
+                </a:solidFill>
+              </a:rPr>
+              <a:t>Projet ISY</a:t>
             </a:r>
-            <a:endParaRPr sz="2000"/>
+            <a:endParaRPr sz="2400" dirty="0">
+              <a:solidFill>
+                <a:schemeClr val="bg1"/>
+              </a:solidFill>
+            </a:endParaRPr>
           </a:p>
         </p:txBody>
       </p:sp>
@@ -40937,6 +41118,257 @@
           </a:p>
         </p:txBody>
       </p:sp>
+      <p:pic>
+        <p:nvPicPr>
+          <p:cNvPr id="9" name="Image 8">
+            <a:extLst>
+              <a:ext uri="{FF2B5EF4-FFF2-40B4-BE49-F238E27FC236}">
+                <a16:creationId xmlns:a16="http://schemas.microsoft.com/office/drawing/2014/main" id="{0A612B78-4BB6-6EF9-6848-1905E47F2513}"/>
+              </a:ext>
+            </a:extLst>
+          </p:cNvPr>
+          <p:cNvPicPr>
+            <a:picLocks noChangeAspect="1"/>
+          </p:cNvPicPr>
+          <p:nvPr/>
+        </p:nvPicPr>
+        <p:blipFill>
+          <a:blip r:embed="rId4">
+            <a:extLst>
+              <a:ext uri="{BEBA8EAE-BF5A-486C-A8C5-ECC9F3942E4B}">
+                <a14:imgProps xmlns:a14="http://schemas.microsoft.com/office/drawing/2010/main">
+                  <a14:imgLayer r:embed="rId5">
+                    <a14:imgEffect>
+                      <a14:backgroundRemoval t="10000" b="90000" l="10000" r="90000">
+                        <a14:foregroundMark x1="41356" y1="44007" x2="58245" y2="51541"/>
+                        <a14:foregroundMark x1="42553" y1="36130" x2="52926" y2="37500"/>
+                        <a14:foregroundMark x1="52926" y1="37500" x2="58112" y2="51884"/>
+                        <a14:foregroundMark x1="58112" y1="51884" x2="49069" y2="49829"/>
+                        <a14:foregroundMark x1="49069" y1="49829" x2="56782" y2="44007"/>
+                        <a14:foregroundMark x1="56782" y1="44007" x2="57314" y2="44349"/>
+                        <a14:foregroundMark x1="58511" y1="35959" x2="56915" y2="74486"/>
+                        <a14:foregroundMark x1="56915" y1="74486" x2="45479" y2="79452"/>
+                        <a14:foregroundMark x1="45479" y1="79452" x2="46410" y2="87842"/>
+                        <a14:foregroundMark x1="55053" y1="30651" x2="47739" y2="38527"/>
+                        <a14:foregroundMark x1="47739" y1="38527" x2="47473" y2="52568"/>
+                        <a14:foregroundMark x1="47473" y1="52568" x2="42420" y2="44178"/>
+                        <a14:foregroundMark x1="42420" y1="44178" x2="40824" y2="35445"/>
+                        <a14:foregroundMark x1="40824" y1="34932" x2="42952" y2="33904"/>
+                        <a14:foregroundMark x1="43085" y1="31507" x2="44149" y2="34932"/>
+                        <a14:foregroundMark x1="40957" y1="29452" x2="49468" y2="35445"/>
+                        <a14:foregroundMark x1="49468" y1="35445" x2="49069" y2="36815"/>
+                        <a14:foregroundMark x1="57181" y1="40925" x2="57846" y2="30479"/>
+                        <a14:foregroundMark x1="57846" y1="30479" x2="63564" y2="40925"/>
+                        <a14:foregroundMark x1="63564" y1="40925" x2="61170" y2="50342"/>
+                        <a14:foregroundMark x1="61170" y1="50342" x2="59973" y2="51370"/>
+                        <a14:foregroundMark x1="52261" y1="56507" x2="52261" y2="56507"/>
+                        <a14:foregroundMark x1="54654" y1="55137" x2="45213" y2="53596"/>
+                        <a14:foregroundMark x1="38165" y1="82877" x2="41489" y2="71233"/>
+                        <a14:foregroundMark x1="41489" y1="71233" x2="48138" y2="66781"/>
+                        <a14:foregroundMark x1="48138" y1="66781" x2="55718" y2="78082"/>
+                        <a14:foregroundMark x1="55718" y1="78082" x2="53590" y2="87842"/>
+                        <a14:foregroundMark x1="53590" y1="87842" x2="45080" y2="88014"/>
+                        <a14:foregroundMark x1="45080" y1="88014" x2="38431" y2="84247"/>
+                        <a14:foregroundMark x1="46144" y1="88014" x2="55585" y2="89212"/>
+                        <a14:foregroundMark x1="69681" y1="79795" x2="68218" y2="81507"/>
+                      </a14:backgroundRemoval>
+                    </a14:imgEffect>
+                  </a14:imgLayer>
+                </a14:imgProps>
+              </a:ext>
+            </a:extLst>
+          </a:blip>
+          <a:stretch>
+            <a:fillRect/>
+          </a:stretch>
+        </p:blipFill>
+        <p:spPr>
+          <a:xfrm>
+            <a:off x="1756252" y="621211"/>
+            <a:ext cx="2033859" cy="1579486"/>
+          </a:xfrm>
+          <a:prstGeom prst="rect">
+            <a:avLst/>
+          </a:prstGeom>
+        </p:spPr>
+      </p:pic>
+      <p:pic>
+        <p:nvPicPr>
+          <p:cNvPr id="11" name="Image 10">
+            <a:extLst>
+              <a:ext uri="{FF2B5EF4-FFF2-40B4-BE49-F238E27FC236}">
+                <a16:creationId xmlns:a16="http://schemas.microsoft.com/office/drawing/2014/main" id="{7AA5514E-6F7F-7563-6E3C-5BB3C80450CF}"/>
+              </a:ext>
+            </a:extLst>
+          </p:cNvPr>
+          <p:cNvPicPr>
+            <a:picLocks noChangeAspect="1"/>
+          </p:cNvPicPr>
+          <p:nvPr/>
+        </p:nvPicPr>
+        <p:blipFill>
+          <a:blip r:embed="rId6">
+            <a:extLst>
+              <a:ext uri="{BEBA8EAE-BF5A-486C-A8C5-ECC9F3942E4B}">
+                <a14:imgProps xmlns:a14="http://schemas.microsoft.com/office/drawing/2010/main">
+                  <a14:imgLayer r:embed="rId7">
+                    <a14:imgEffect>
+                      <a14:backgroundRemoval t="7479" b="94444" l="9966" r="89863">
+                        <a14:foregroundMark x1="40722" y1="10256" x2="50859" y2="7265"/>
+                        <a14:foregroundMark x1="50859" y1="7265" x2="63230" y2="7479"/>
+                        <a14:foregroundMark x1="63230" y1="7479" x2="66667" y2="9188"/>
+                        <a14:foregroundMark x1="45533" y1="46795" x2="59278" y2="52350"/>
+                        <a14:foregroundMark x1="46564" y1="47009" x2="51718" y2="53846"/>
+                        <a14:foregroundMark x1="35911" y1="46795" x2="35911" y2="52350"/>
+                        <a14:foregroundMark x1="36942" y1="70726" x2="45189" y2="83333"/>
+                        <a14:foregroundMark x1="45189" y1="83333" x2="53780" y2="84829"/>
+                        <a14:foregroundMark x1="53780" y1="84829" x2="66323" y2="78846"/>
+                        <a14:foregroundMark x1="66323" y1="78846" x2="69588" y2="72863"/>
+                        <a14:foregroundMark x1="69072" y1="72009" x2="78694" y2="77350"/>
+                        <a14:foregroundMark x1="78694" y1="77350" x2="80584" y2="77564"/>
+                        <a14:foregroundMark x1="80069" y1="77991" x2="69072" y2="89103"/>
+                        <a14:foregroundMark x1="71478" y1="88034" x2="61684" y2="93590"/>
+                        <a14:foregroundMark x1="61684" y1="93590" x2="38832" y2="91667"/>
+                        <a14:foregroundMark x1="38832" y1="91667" x2="30928" y2="85470"/>
+                        <a14:foregroundMark x1="30928" y1="85470" x2="34708" y2="74145"/>
+                        <a14:foregroundMark x1="34708" y1="74145" x2="36942" y2="71581"/>
+                        <a14:foregroundMark x1="33505" y1="86752" x2="25945" y2="79274"/>
+                        <a14:foregroundMark x1="25945" y1="79274" x2="25601" y2="78419"/>
+                        <a14:foregroundMark x1="29381" y1="82692" x2="38144" y2="91453"/>
+                        <a14:foregroundMark x1="38144" y1="91453" x2="44845" y2="92949"/>
+                        <a14:foregroundMark x1="35052" y1="88675" x2="50344" y2="94444"/>
+                        <a14:foregroundMark x1="80928" y1="78419" x2="71478" y2="91239"/>
+                      </a14:backgroundRemoval>
+                    </a14:imgEffect>
+                  </a14:imgLayer>
+                </a14:imgProps>
+              </a:ext>
+            </a:extLst>
+          </a:blip>
+          <a:stretch>
+            <a:fillRect/>
+          </a:stretch>
+        </p:blipFill>
+        <p:spPr>
+          <a:xfrm>
+            <a:off x="5443846" y="753982"/>
+            <a:ext cx="1690057" cy="1359015"/>
+          </a:xfrm>
+          <a:prstGeom prst="rect">
+            <a:avLst/>
+          </a:prstGeom>
+        </p:spPr>
+      </p:pic>
+      <p:pic>
+        <p:nvPicPr>
+          <p:cNvPr id="13" name="Image 12">
+            <a:extLst>
+              <a:ext uri="{FF2B5EF4-FFF2-40B4-BE49-F238E27FC236}">
+                <a16:creationId xmlns:a16="http://schemas.microsoft.com/office/drawing/2014/main" id="{3661B435-855E-C4AB-7DE8-34D431387499}"/>
+              </a:ext>
+            </a:extLst>
+          </p:cNvPr>
+          <p:cNvPicPr>
+            <a:picLocks noChangeAspect="1"/>
+          </p:cNvPicPr>
+          <p:nvPr/>
+        </p:nvPicPr>
+        <p:blipFill>
+          <a:blip r:embed="rId8">
+            <a:extLst>
+              <a:ext uri="{BEBA8EAE-BF5A-486C-A8C5-ECC9F3942E4B}">
+                <a14:imgProps xmlns:a14="http://schemas.microsoft.com/office/drawing/2010/main">
+                  <a14:imgLayer r:embed="rId9">
+                    <a14:imgEffect>
+                      <a14:backgroundRemoval t="10000" b="90000" l="10000" r="90000">
+                        <a14:foregroundMark x1="40177" y1="53747" x2="49381" y2="68951"/>
+                        <a14:foregroundMark x1="49381" y1="68951" x2="58584" y2="71306"/>
+                        <a14:foregroundMark x1="58584" y1="71306" x2="63894" y2="62741"/>
+                        <a14:foregroundMark x1="63894" y1="62741" x2="54867" y2="58030"/>
+                        <a14:foregroundMark x1="54867" y1="58030" x2="52389" y2="60385"/>
+                        <a14:foregroundMark x1="50973" y1="56531" x2="63894" y2="55460"/>
+                        <a14:foregroundMark x1="63894" y1="55460" x2="63363" y2="62527"/>
+                        <a14:foregroundMark x1="49912" y1="59529" x2="58761" y2="68951"/>
+                        <a14:foregroundMark x1="58761" y1="68951" x2="59292" y2="69165"/>
+                        <a14:foregroundMark x1="59823" y1="55889" x2="44425" y2="52248"/>
+                        <a14:foregroundMark x1="50088" y1="55460" x2="60885" y2="61028"/>
+                        <a14:foregroundMark x1="60885" y1="61028" x2="60885" y2="61028"/>
+                        <a14:foregroundMark x1="36991" y1="35760" x2="36106" y2="24625"/>
+                        <a14:foregroundMark x1="36106" y1="24625" x2="44248" y2="13919"/>
+                        <a14:foregroundMark x1="44248" y1="13919" x2="56814" y2="11349"/>
+                        <a14:foregroundMark x1="56814" y1="11349" x2="67965" y2="17987"/>
+                        <a14:foregroundMark x1="67965" y1="17987" x2="71858" y2="31263"/>
+                        <a14:foregroundMark x1="71858" y1="31263" x2="71681" y2="33405"/>
+                      </a14:backgroundRemoval>
+                    </a14:imgEffect>
+                  </a14:imgLayer>
+                </a14:imgProps>
+              </a:ext>
+            </a:extLst>
+          </a:blip>
+          <a:stretch>
+            <a:fillRect/>
+          </a:stretch>
+        </p:blipFill>
+        <p:spPr>
+          <a:xfrm>
+            <a:off x="1899655" y="2668479"/>
+            <a:ext cx="1822689" cy="1506541"/>
+          </a:xfrm>
+          <a:prstGeom prst="rect">
+            <a:avLst/>
+          </a:prstGeom>
+        </p:spPr>
+      </p:pic>
+      <p:pic>
+        <p:nvPicPr>
+          <p:cNvPr id="15" name="Image 14">
+            <a:extLst>
+              <a:ext uri="{FF2B5EF4-FFF2-40B4-BE49-F238E27FC236}">
+                <a16:creationId xmlns:a16="http://schemas.microsoft.com/office/drawing/2014/main" id="{5178BFD1-9B08-4803-853B-93613673342C}"/>
+              </a:ext>
+            </a:extLst>
+          </p:cNvPr>
+          <p:cNvPicPr>
+            <a:picLocks noChangeAspect="1"/>
+          </p:cNvPicPr>
+          <p:nvPr/>
+        </p:nvPicPr>
+        <p:blipFill>
+          <a:blip r:embed="rId10">
+            <a:extLst>
+              <a:ext uri="{BEBA8EAE-BF5A-486C-A8C5-ECC9F3942E4B}">
+                <a14:imgProps xmlns:a14="http://schemas.microsoft.com/office/drawing/2010/main">
+                  <a14:imgLayer r:embed="rId11">
+                    <a14:imgEffect>
+                      <a14:backgroundRemoval t="10000" b="90000" l="10000" r="90000">
+                        <a14:foregroundMark x1="53480" y1="38631" x2="63158" y2="45916"/>
+                        <a14:foregroundMark x1="63158" y1="45916" x2="64177" y2="46358"/>
+                        <a14:foregroundMark x1="59423" y1="38411" x2="67063" y2="45916"/>
+                        <a14:foregroundMark x1="67063" y1="45916" x2="57216" y2="48344"/>
+                        <a14:foregroundMark x1="73345" y1="47461" x2="72326" y2="54525"/>
+                        <a14:foregroundMark x1="66893" y1="66225" x2="68930" y2="72185"/>
+                      </a14:backgroundRemoval>
+                    </a14:imgEffect>
+                  </a14:imgLayer>
+                </a14:imgProps>
+              </a:ext>
+            </a:extLst>
+          </a:blip>
+          <a:stretch>
+            <a:fillRect/>
+          </a:stretch>
+        </p:blipFill>
+        <p:spPr>
+          <a:xfrm>
+            <a:off x="5316583" y="2665715"/>
+            <a:ext cx="1944582" cy="1495579"/>
+          </a:xfrm>
+          <a:prstGeom prst="rect">
+            <a:avLst/>
+          </a:prstGeom>
+        </p:spPr>
+      </p:pic>
     </p:spTree>
   </p:cSld>
   <p:clrMapOvr>
